--- a/images/diagram.pptx
+++ b/images/diagram.pptx
@@ -5018,7 +5018,7 @@
         </p:nvSpPr>
         <p:spPr>
           <a:xfrm>
-            <a:off x="7018247" y="667482"/>
+            <a:off x="7140167" y="667482"/>
             <a:ext cx="972431" cy="951036"/>
           </a:xfrm>
           <a:prstGeom prst="rect">
@@ -5227,7 +5227,7 @@
         <p:spPr>
           <a:xfrm>
             <a:off x="6555556" y="1141304"/>
-            <a:ext cx="462691" cy="1696"/>
+            <a:ext cx="584611" cy="1696"/>
           </a:xfrm>
           <a:prstGeom prst="straightConnector1">
             <a:avLst/>
@@ -5348,8 +5348,8 @@
         </p:nvCxnSpPr>
         <p:spPr>
           <a:xfrm>
-            <a:off x="7990678" y="1143000"/>
-            <a:ext cx="690335" cy="0"/>
+            <a:off x="8112598" y="1143000"/>
+            <a:ext cx="568415" cy="0"/>
           </a:xfrm>
           <a:prstGeom prst="straightConnector1">
             <a:avLst/>
@@ -5512,7 +5512,7 @@
           <p:nvPr/>
         </p:nvSpPr>
         <p:spPr>
-          <a:xfrm rot="18732000">
+          <a:xfrm rot="18728327">
             <a:off x="4834078" y="1087687"/>
             <a:ext cx="570872" cy="307777"/>
           </a:xfrm>

--- a/images/diagram.pptx
+++ b/images/diagram.pptx
@@ -5,11 +5,7 @@
     <p:sldMasterId id="2147483804" r:id="rId1"/>
   </p:sldMasterIdLst>
   <p:sldIdLst>
-    <p:sldId id="257" r:id="rId2"/>
-    <p:sldId id="258" r:id="rId3"/>
-    <p:sldId id="260" r:id="rId4"/>
-    <p:sldId id="261" r:id="rId5"/>
-    <p:sldId id="259" r:id="rId6"/>
+    <p:sldId id="261" r:id="rId2"/>
   </p:sldIdLst>
   <p:sldSz cx="10058400" cy="2286000"/>
   <p:notesSz cx="6858000" cy="9144000"/>
@@ -116,6 +112,95 @@
 </p:presentation>
 </file>
 
+<file path=ppt/revisionInfo.xml><?xml version="1.0" encoding="utf-8"?>
+<p1510:revInfo xmlns:a="http://schemas.openxmlformats.org/drawingml/2006/main" xmlns:r="http://schemas.openxmlformats.org/officeDocument/2006/relationships" xmlns:p1510="http://schemas.microsoft.com/office/powerpoint/2015/10/main">
+  <p1510:revLst>
+    <p1510:client id="{DFF1FB23-F895-1D6A-BB3B-94B09C16C952}" v="6" dt="2026-06-22T06:20:39.342"/>
+  </p1510:revLst>
+</p1510:revInfo>
+</file>
+
+<file path=ppt/changesInfos/changesInfo1.xml><?xml version="1.0" encoding="utf-8"?>
+<pc:chgInfo xmlns:a="http://schemas.openxmlformats.org/drawingml/2006/main" xmlns:r="http://schemas.openxmlformats.org/officeDocument/2006/relationships" xmlns:ac="http://schemas.microsoft.com/office/drawing/2013/main/command" xmlns:pc="http://schemas.microsoft.com/office/powerpoint/2013/main/command">
+  <pc:docChgLst>
+    <pc:chgData name="David Trabish" userId="S::davidtrabish@nus.edu.sg::54dc2e98-9371-4be9-9b74-030d15aa913b" providerId="AD" clId="Web-{DFF1FB23-F895-1D6A-BB3B-94B09C16C952}"/>
+    <pc:docChg chg="delSld modSld">
+      <pc:chgData name="David Trabish" userId="S::davidtrabish@nus.edu.sg::54dc2e98-9371-4be9-9b74-030d15aa913b" providerId="AD" clId="Web-{DFF1FB23-F895-1D6A-BB3B-94B09C16C952}" dt="2026-06-22T06:20:39.342" v="4"/>
+      <pc:docMkLst>
+        <pc:docMk/>
+      </pc:docMkLst>
+      <pc:sldChg chg="del">
+        <pc:chgData name="David Trabish" userId="S::davidtrabish@nus.edu.sg::54dc2e98-9371-4be9-9b74-030d15aa913b" providerId="AD" clId="Web-{DFF1FB23-F895-1D6A-BB3B-94B09C16C952}" dt="2026-06-22T06:20:36.905" v="3"/>
+        <pc:sldMkLst>
+          <pc:docMk/>
+          <pc:sldMk cId="1703506588" sldId="257"/>
+        </pc:sldMkLst>
+      </pc:sldChg>
+      <pc:sldChg chg="del">
+        <pc:chgData name="David Trabish" userId="S::davidtrabish@nus.edu.sg::54dc2e98-9371-4be9-9b74-030d15aa913b" providerId="AD" clId="Web-{DFF1FB23-F895-1D6A-BB3B-94B09C16C952}" dt="2026-06-22T06:20:36.905" v="2"/>
+        <pc:sldMkLst>
+          <pc:docMk/>
+          <pc:sldMk cId="3729777158" sldId="258"/>
+        </pc:sldMkLst>
+      </pc:sldChg>
+      <pc:sldChg chg="del">
+        <pc:chgData name="David Trabish" userId="S::davidtrabish@nus.edu.sg::54dc2e98-9371-4be9-9b74-030d15aa913b" providerId="AD" clId="Web-{DFF1FB23-F895-1D6A-BB3B-94B09C16C952}" dt="2026-06-22T06:20:39.342" v="4"/>
+        <pc:sldMkLst>
+          <pc:docMk/>
+          <pc:sldMk cId="3786142267" sldId="259"/>
+        </pc:sldMkLst>
+      </pc:sldChg>
+      <pc:sldChg chg="del">
+        <pc:chgData name="David Trabish" userId="S::davidtrabish@nus.edu.sg::54dc2e98-9371-4be9-9b74-030d15aa913b" providerId="AD" clId="Web-{DFF1FB23-F895-1D6A-BB3B-94B09C16C952}" dt="2026-06-22T06:20:36.889" v="1"/>
+        <pc:sldMkLst>
+          <pc:docMk/>
+          <pc:sldMk cId="896789822" sldId="260"/>
+        </pc:sldMkLst>
+      </pc:sldChg>
+      <pc:sldChg chg="modSp">
+        <pc:chgData name="David Trabish" userId="S::davidtrabish@nus.edu.sg::54dc2e98-9371-4be9-9b74-030d15aa913b" providerId="AD" clId="Web-{DFF1FB23-F895-1D6A-BB3B-94B09C16C952}" dt="2026-06-22T06:18:02.744" v="0" actId="20577"/>
+        <pc:sldMkLst>
+          <pc:docMk/>
+          <pc:sldMk cId="2045650364" sldId="261"/>
+        </pc:sldMkLst>
+        <pc:spChg chg="mod">
+          <ac:chgData name="David Trabish" userId="S::davidtrabish@nus.edu.sg::54dc2e98-9371-4be9-9b74-030d15aa913b" providerId="AD" clId="Web-{DFF1FB23-F895-1D6A-BB3B-94B09C16C952}" dt="2026-06-22T06:18:02.744" v="0" actId="20577"/>
+          <ac:spMkLst>
+            <pc:docMk/>
+            <pc:sldMk cId="2045650364" sldId="261"/>
+            <ac:spMk id="3" creationId="{B7924044-2BDB-44D2-ACE9-161B03224E8D}"/>
+          </ac:spMkLst>
+        </pc:spChg>
+      </pc:sldChg>
+    </pc:docChg>
+  </pc:docChgLst>
+  <pc:docChgLst>
+    <pc:chgData clId="Web-{DFF1FB23-F895-1D6A-BB3B-94B09C16C952}"/>
+    <pc:docChg chg="modSld">
+      <pc:chgData name="" userId="" providerId="" clId="Web-{DFF1FB23-F895-1D6A-BB3B-94B09C16C952}" dt="2026-06-22T06:18:01.666" v="0" actId="20577"/>
+      <pc:docMkLst>
+        <pc:docMk/>
+      </pc:docMkLst>
+      <pc:sldChg chg="modSp">
+        <pc:chgData name="" userId="" providerId="" clId="Web-{DFF1FB23-F895-1D6A-BB3B-94B09C16C952}" dt="2026-06-22T06:18:01.666" v="0" actId="20577"/>
+        <pc:sldMkLst>
+          <pc:docMk/>
+          <pc:sldMk cId="2045650364" sldId="261"/>
+        </pc:sldMkLst>
+        <pc:spChg chg="mod">
+          <ac:chgData name="" userId="" providerId="" clId="Web-{DFF1FB23-F895-1D6A-BB3B-94B09C16C952}" dt="2026-06-22T06:18:01.666" v="0" actId="20577"/>
+          <ac:spMkLst>
+            <pc:docMk/>
+            <pc:sldMk cId="2045650364" sldId="261"/>
+            <ac:spMk id="3" creationId="{B7924044-2BDB-44D2-ACE9-161B03224E8D}"/>
+          </ac:spMkLst>
+        </pc:spChg>
+      </pc:sldChg>
+    </pc:docChg>
+  </pc:docChgLst>
+</pc:chgInfo>
+</file>
+
 <file path=ppt/slideLayouts/slideLayout1.xml><?xml version="1.0" encoding="utf-8"?>
 <p:sldLayout xmlns:a="http://schemas.openxmlformats.org/drawingml/2006/main" xmlns:r="http://schemas.openxmlformats.org/officeDocument/2006/relationships" xmlns:p="http://schemas.openxmlformats.org/presentationml/2006/main" type="title" preserve="1">
   <p:cSld name="Title Slide">
@@ -247,7 +332,7 @@
           <a:p>
             <a:fld id="{38A16130-5E25-47D4-A299-838FA4625973}" type="datetimeFigureOut">
               <a:rPr lang="en-US" smtClean="0"/>
-              <a:t>6/18/2026</a:t>
+              <a:t>6/21/2026</a:t>
             </a:fld>
             <a:endParaRPr lang="en-US"/>
           </a:p>
@@ -417,7 +502,7 @@
           <a:p>
             <a:fld id="{38A16130-5E25-47D4-A299-838FA4625973}" type="datetimeFigureOut">
               <a:rPr lang="en-US" smtClean="0"/>
-              <a:t>6/18/2026</a:t>
+              <a:t>6/21/2026</a:t>
             </a:fld>
             <a:endParaRPr lang="en-US"/>
           </a:p>
@@ -597,7 +682,7 @@
           <a:p>
             <a:fld id="{38A16130-5E25-47D4-A299-838FA4625973}" type="datetimeFigureOut">
               <a:rPr lang="en-US" smtClean="0"/>
-              <a:t>6/18/2026</a:t>
+              <a:t>6/21/2026</a:t>
             </a:fld>
             <a:endParaRPr lang="en-US"/>
           </a:p>
@@ -767,7 +852,7 @@
           <a:p>
             <a:fld id="{38A16130-5E25-47D4-A299-838FA4625973}" type="datetimeFigureOut">
               <a:rPr lang="en-US" smtClean="0"/>
-              <a:t>6/18/2026</a:t>
+              <a:t>6/21/2026</a:t>
             </a:fld>
             <a:endParaRPr lang="en-US"/>
           </a:p>
@@ -1013,7 +1098,7 @@
           <a:p>
             <a:fld id="{38A16130-5E25-47D4-A299-838FA4625973}" type="datetimeFigureOut">
               <a:rPr lang="en-US" smtClean="0"/>
-              <a:t>6/18/2026</a:t>
+              <a:t>6/21/2026</a:t>
             </a:fld>
             <a:endParaRPr lang="en-US"/>
           </a:p>
@@ -1245,7 +1330,7 @@
           <a:p>
             <a:fld id="{38A16130-5E25-47D4-A299-838FA4625973}" type="datetimeFigureOut">
               <a:rPr lang="en-US" smtClean="0"/>
-              <a:t>6/18/2026</a:t>
+              <a:t>6/21/2026</a:t>
             </a:fld>
             <a:endParaRPr lang="en-US"/>
           </a:p>
@@ -1612,7 +1697,7 @@
           <a:p>
             <a:fld id="{38A16130-5E25-47D4-A299-838FA4625973}" type="datetimeFigureOut">
               <a:rPr lang="en-US" smtClean="0"/>
-              <a:t>6/18/2026</a:t>
+              <a:t>6/21/2026</a:t>
             </a:fld>
             <a:endParaRPr lang="en-US"/>
           </a:p>
@@ -1730,7 +1815,7 @@
           <a:p>
             <a:fld id="{38A16130-5E25-47D4-A299-838FA4625973}" type="datetimeFigureOut">
               <a:rPr lang="en-US" smtClean="0"/>
-              <a:t>6/18/2026</a:t>
+              <a:t>6/21/2026</a:t>
             </a:fld>
             <a:endParaRPr lang="en-US"/>
           </a:p>
@@ -1825,7 +1910,7 @@
           <a:p>
             <a:fld id="{38A16130-5E25-47D4-A299-838FA4625973}" type="datetimeFigureOut">
               <a:rPr lang="en-US" smtClean="0"/>
-              <a:t>6/18/2026</a:t>
+              <a:t>6/21/2026</a:t>
             </a:fld>
             <a:endParaRPr lang="en-US"/>
           </a:p>
@@ -2102,7 +2187,7 @@
           <a:p>
             <a:fld id="{38A16130-5E25-47D4-A299-838FA4625973}" type="datetimeFigureOut">
               <a:rPr lang="en-US" smtClean="0"/>
-              <a:t>6/18/2026</a:t>
+              <a:t>6/21/2026</a:t>
             </a:fld>
             <a:endParaRPr lang="en-US"/>
           </a:p>
@@ -2359,7 +2444,7 @@
           <a:p>
             <a:fld id="{38A16130-5E25-47D4-A299-838FA4625973}" type="datetimeFigureOut">
               <a:rPr lang="en-US" smtClean="0"/>
-              <a:t>6/18/2026</a:t>
+              <a:t>6/21/2026</a:t>
             </a:fld>
             <a:endParaRPr lang="en-US"/>
           </a:p>
@@ -2572,7 +2657,7 @@
           <a:p>
             <a:fld id="{38A16130-5E25-47D4-A299-838FA4625973}" type="datetimeFigureOut">
               <a:rPr lang="en-US" smtClean="0"/>
-              <a:t>6/18/2026</a:t>
+              <a:t>6/21/2026</a:t>
             </a:fld>
             <a:endParaRPr lang="en-US"/>
           </a:p>
@@ -2979,1687 +3064,6 @@
       </p:grpSpPr>
       <p:sp>
         <p:nvSpPr>
-          <p:cNvPr id="3" name="Rectangle 2">
-            <a:extLst>
-              <a:ext uri="{FF2B5EF4-FFF2-40B4-BE49-F238E27FC236}">
-                <a16:creationId xmlns:a16="http://schemas.microsoft.com/office/drawing/2014/main" id="{B7924044-2BDB-44D2-ACE9-161B03224E8D}"/>
-              </a:ext>
-            </a:extLst>
-          </p:cNvPr>
-          <p:cNvSpPr/>
-          <p:nvPr/>
-        </p:nvSpPr>
-        <p:spPr>
-          <a:xfrm>
-            <a:off x="3611420" y="616530"/>
-            <a:ext cx="471055" cy="339437"/>
-          </a:xfrm>
-          <a:prstGeom prst="rect">
-            <a:avLst/>
-          </a:prstGeom>
-          <a:solidFill>
-            <a:srgbClr val="7030A0">
-              <a:alpha val="30000"/>
-            </a:srgbClr>
-          </a:solidFill>
-          <a:ln>
-            <a:solidFill>
-              <a:schemeClr val="tx1"/>
-            </a:solidFill>
-          </a:ln>
-        </p:spPr>
-        <p:style>
-          <a:lnRef idx="2">
-            <a:schemeClr val="accent1">
-              <a:shade val="50000"/>
-            </a:schemeClr>
-          </a:lnRef>
-          <a:fillRef idx="1">
-            <a:schemeClr val="accent1"/>
-          </a:fillRef>
-          <a:effectRef idx="0">
-            <a:schemeClr val="accent1"/>
-          </a:effectRef>
-          <a:fontRef idx="minor">
-            <a:schemeClr val="lt1"/>
-          </a:fontRef>
-        </p:style>
-        <p:txBody>
-          <a:bodyPr rot="0" spcFirstLastPara="0" vertOverflow="overflow" horzOverflow="overflow" vert="horz" wrap="square" lIns="25400" tIns="12700" rIns="25400" bIns="12700" numCol="1" spcCol="0" rtlCol="0" fromWordArt="0" anchor="ctr" anchorCtr="0" forceAA="0" compatLnSpc="1">
-            <a:prstTxWarp prst="textNoShape">
-              <a:avLst/>
-            </a:prstTxWarp>
-            <a:noAutofit/>
-          </a:bodyPr>
-          <a:lstStyle/>
-          <a:p>
-            <a:pPr algn="ctr"/>
-            <a:r>
-              <a:rPr lang="en-US" sz="500" dirty="0">
-                <a:solidFill>
-                  <a:schemeClr val="tx1"/>
-                </a:solidFill>
-              </a:rPr>
-              <a:t>LLVM IR</a:t>
-            </a:r>
-          </a:p>
-          <a:p>
-            <a:pPr algn="ctr"/>
-            <a:r>
-              <a:rPr lang="en-US" sz="500" dirty="0">
-                <a:solidFill>
-                  <a:schemeClr val="tx1"/>
-                </a:solidFill>
-              </a:rPr>
-              <a:t>Program</a:t>
-            </a:r>
-          </a:p>
-        </p:txBody>
-      </p:sp>
-      <p:sp>
-        <p:nvSpPr>
-          <p:cNvPr id="38" name="Rectangle 37">
-            <a:extLst>
-              <a:ext uri="{FF2B5EF4-FFF2-40B4-BE49-F238E27FC236}">
-                <a16:creationId xmlns:a16="http://schemas.microsoft.com/office/drawing/2014/main" id="{C9AD1F5A-91A8-4AFE-9928-651CFC6548B0}"/>
-              </a:ext>
-            </a:extLst>
-          </p:cNvPr>
-          <p:cNvSpPr/>
-          <p:nvPr/>
-        </p:nvSpPr>
-        <p:spPr>
-          <a:xfrm>
-            <a:off x="4191773" y="594594"/>
-            <a:ext cx="544945" cy="383309"/>
-          </a:xfrm>
-          <a:prstGeom prst="rect">
-            <a:avLst/>
-          </a:prstGeom>
-          <a:solidFill>
-            <a:srgbClr val="FDDF03">
-              <a:alpha val="29804"/>
-            </a:srgbClr>
-          </a:solidFill>
-          <a:ln>
-            <a:solidFill>
-              <a:schemeClr val="tx1"/>
-            </a:solidFill>
-          </a:ln>
-        </p:spPr>
-        <p:style>
-          <a:lnRef idx="2">
-            <a:schemeClr val="accent1">
-              <a:shade val="50000"/>
-            </a:schemeClr>
-          </a:lnRef>
-          <a:fillRef idx="1">
-            <a:schemeClr val="accent1"/>
-          </a:fillRef>
-          <a:effectRef idx="0">
-            <a:schemeClr val="accent1"/>
-          </a:effectRef>
-          <a:fontRef idx="minor">
-            <a:schemeClr val="lt1"/>
-          </a:fontRef>
-        </p:style>
-        <p:txBody>
-          <a:bodyPr rot="0" spcFirstLastPara="0" vertOverflow="overflow" horzOverflow="overflow" vert="horz" wrap="square" lIns="25400" tIns="12700" rIns="25400" bIns="12700" numCol="1" spcCol="0" rtlCol="0" fromWordArt="0" anchor="ctr" anchorCtr="0" forceAA="0" compatLnSpc="1">
-            <a:prstTxWarp prst="textNoShape">
-              <a:avLst/>
-            </a:prstTxWarp>
-            <a:noAutofit/>
-          </a:bodyPr>
-          <a:lstStyle/>
-          <a:p>
-            <a:pPr algn="ctr"/>
-            <a:r>
-              <a:rPr lang="en-US" sz="500" dirty="0">
-                <a:solidFill>
-                  <a:schemeClr val="tx1"/>
-                </a:solidFill>
-              </a:rPr>
-              <a:t>SE Engine</a:t>
-            </a:r>
-          </a:p>
-        </p:txBody>
-      </p:sp>
-      <p:sp>
-        <p:nvSpPr>
-          <p:cNvPr id="39" name="Rectangle 38">
-            <a:extLst>
-              <a:ext uri="{FF2B5EF4-FFF2-40B4-BE49-F238E27FC236}">
-                <a16:creationId xmlns:a16="http://schemas.microsoft.com/office/drawing/2014/main" id="{F18DC31B-8FAF-4796-A068-48E9FBC01E7D}"/>
-              </a:ext>
-            </a:extLst>
-          </p:cNvPr>
-          <p:cNvSpPr/>
-          <p:nvPr/>
-        </p:nvSpPr>
-        <p:spPr>
-          <a:xfrm>
-            <a:off x="5012269" y="675797"/>
-            <a:ext cx="544945" cy="383309"/>
-          </a:xfrm>
-          <a:prstGeom prst="rect">
-            <a:avLst/>
-          </a:prstGeom>
-          <a:solidFill>
-            <a:srgbClr val="3371D5">
-              <a:alpha val="29804"/>
-            </a:srgbClr>
-          </a:solidFill>
-          <a:ln>
-            <a:solidFill>
-              <a:schemeClr val="tx1">
-                <a:alpha val="93000"/>
-              </a:schemeClr>
-            </a:solidFill>
-          </a:ln>
-        </p:spPr>
-        <p:style>
-          <a:lnRef idx="2">
-            <a:schemeClr val="accent1">
-              <a:shade val="50000"/>
-            </a:schemeClr>
-          </a:lnRef>
-          <a:fillRef idx="1">
-            <a:schemeClr val="accent1"/>
-          </a:fillRef>
-          <a:effectRef idx="0">
-            <a:schemeClr val="accent1"/>
-          </a:effectRef>
-          <a:fontRef idx="minor">
-            <a:schemeClr val="lt1"/>
-          </a:fontRef>
-        </p:style>
-        <p:txBody>
-          <a:bodyPr rot="0" spcFirstLastPara="0" vertOverflow="overflow" horzOverflow="overflow" vert="horz" wrap="square" lIns="25400" tIns="12700" rIns="25400" bIns="12700" numCol="1" spcCol="0" rtlCol="0" fromWordArt="0" anchor="ctr" anchorCtr="0" forceAA="0" compatLnSpc="1">
-            <a:prstTxWarp prst="textNoShape">
-              <a:avLst/>
-            </a:prstTxWarp>
-            <a:noAutofit/>
-          </a:bodyPr>
-          <a:lstStyle/>
-          <a:p>
-            <a:pPr algn="ctr"/>
-            <a:r>
-              <a:rPr lang="en-US" sz="500" dirty="0">
-                <a:solidFill>
-                  <a:schemeClr val="tx1"/>
-                </a:solidFill>
-              </a:rPr>
-              <a:t>Proof Script</a:t>
-            </a:r>
-          </a:p>
-        </p:txBody>
-      </p:sp>
-      <p:sp>
-        <p:nvSpPr>
-          <p:cNvPr id="49" name="Rectangle 48">
-            <a:extLst>
-              <a:ext uri="{FF2B5EF4-FFF2-40B4-BE49-F238E27FC236}">
-                <a16:creationId xmlns:a16="http://schemas.microsoft.com/office/drawing/2014/main" id="{20E6DCC3-14A4-4537-98F6-3E354E907050}"/>
-              </a:ext>
-            </a:extLst>
-          </p:cNvPr>
-          <p:cNvSpPr/>
-          <p:nvPr/>
-        </p:nvSpPr>
-        <p:spPr>
-          <a:xfrm>
-            <a:off x="5800439" y="675797"/>
-            <a:ext cx="544945" cy="383309"/>
-          </a:xfrm>
-          <a:prstGeom prst="rect">
-            <a:avLst/>
-          </a:prstGeom>
-          <a:solidFill>
-            <a:srgbClr val="3371D5">
-              <a:alpha val="29804"/>
-            </a:srgbClr>
-          </a:solidFill>
-          <a:ln>
-            <a:solidFill>
-              <a:schemeClr val="tx1">
-                <a:alpha val="93000"/>
-              </a:schemeClr>
-            </a:solidFill>
-          </a:ln>
-        </p:spPr>
-        <p:style>
-          <a:lnRef idx="2">
-            <a:schemeClr val="accent1">
-              <a:shade val="50000"/>
-            </a:schemeClr>
-          </a:lnRef>
-          <a:fillRef idx="1">
-            <a:schemeClr val="accent1"/>
-          </a:fillRef>
-          <a:effectRef idx="0">
-            <a:schemeClr val="accent1"/>
-          </a:effectRef>
-          <a:fontRef idx="minor">
-            <a:schemeClr val="lt1"/>
-          </a:fontRef>
-        </p:style>
-        <p:txBody>
-          <a:bodyPr rot="0" spcFirstLastPara="0" vertOverflow="overflow" horzOverflow="overflow" vert="horz" wrap="square" lIns="25400" tIns="12700" rIns="25400" bIns="12700" numCol="1" spcCol="0" rtlCol="0" fromWordArt="0" anchor="ctr" anchorCtr="0" forceAA="0" compatLnSpc="1">
-            <a:prstTxWarp prst="textNoShape">
-              <a:avLst/>
-            </a:prstTxWarp>
-            <a:noAutofit/>
-          </a:bodyPr>
-          <a:lstStyle/>
-          <a:p>
-            <a:pPr algn="ctr"/>
-            <a:r>
-              <a:rPr lang="en-US" sz="500" dirty="0">
-                <a:solidFill>
-                  <a:schemeClr val="tx1"/>
-                </a:solidFill>
-              </a:rPr>
-              <a:t>Theoretical</a:t>
-            </a:r>
-          </a:p>
-          <a:p>
-            <a:pPr algn="ctr"/>
-            <a:r>
-              <a:rPr lang="en-US" sz="500" dirty="0">
-                <a:solidFill>
-                  <a:schemeClr val="tx1"/>
-                </a:solidFill>
-              </a:rPr>
-              <a:t>Framework</a:t>
-            </a:r>
-          </a:p>
-        </p:txBody>
-      </p:sp>
-      <p:sp>
-        <p:nvSpPr>
-          <p:cNvPr id="50" name="Rectangle 49">
-            <a:extLst>
-              <a:ext uri="{FF2B5EF4-FFF2-40B4-BE49-F238E27FC236}">
-                <a16:creationId xmlns:a16="http://schemas.microsoft.com/office/drawing/2014/main" id="{ECF798E2-BCBB-4C83-8DAD-28B4CA242422}"/>
-              </a:ext>
-            </a:extLst>
-          </p:cNvPr>
-          <p:cNvSpPr/>
-          <p:nvPr/>
-        </p:nvSpPr>
-        <p:spPr>
-          <a:xfrm>
-            <a:off x="4344941" y="1308104"/>
-            <a:ext cx="544945" cy="383309"/>
-          </a:xfrm>
-          <a:prstGeom prst="rect">
-            <a:avLst/>
-          </a:prstGeom>
-          <a:solidFill>
-            <a:schemeClr val="accent6">
-              <a:alpha val="30000"/>
-            </a:schemeClr>
-          </a:solidFill>
-          <a:ln>
-            <a:solidFill>
-              <a:schemeClr val="tx1"/>
-            </a:solidFill>
-          </a:ln>
-        </p:spPr>
-        <p:style>
-          <a:lnRef idx="2">
-            <a:schemeClr val="accent1">
-              <a:shade val="50000"/>
-            </a:schemeClr>
-          </a:lnRef>
-          <a:fillRef idx="1">
-            <a:schemeClr val="accent1"/>
-          </a:fillRef>
-          <a:effectRef idx="0">
-            <a:schemeClr val="accent1"/>
-          </a:effectRef>
-          <a:fontRef idx="minor">
-            <a:schemeClr val="lt1"/>
-          </a:fontRef>
-        </p:style>
-        <p:txBody>
-          <a:bodyPr rot="0" spcFirstLastPara="0" vertOverflow="overflow" horzOverflow="overflow" vert="horz" wrap="square" lIns="25400" tIns="12700" rIns="25400" bIns="12700" numCol="1" spcCol="0" rtlCol="0" fromWordArt="0" anchor="ctr" anchorCtr="0" forceAA="0" compatLnSpc="1">
-            <a:prstTxWarp prst="textNoShape">
-              <a:avLst/>
-            </a:prstTxWarp>
-            <a:noAutofit/>
-          </a:bodyPr>
-          <a:lstStyle/>
-          <a:p>
-            <a:pPr algn="ctr"/>
-            <a:r>
-              <a:rPr lang="en-US" sz="500" dirty="0">
-                <a:solidFill>
-                  <a:schemeClr val="tx1"/>
-                </a:solidFill>
-              </a:rPr>
-              <a:t>Proof Assistant</a:t>
-            </a:r>
-          </a:p>
-        </p:txBody>
-      </p:sp>
-    </p:spTree>
-    <p:extLst>
-      <p:ext uri="{BB962C8B-B14F-4D97-AF65-F5344CB8AC3E}">
-        <p14:creationId xmlns:p14="http://schemas.microsoft.com/office/powerpoint/2010/main" val="1703506588"/>
-      </p:ext>
-    </p:extLst>
-  </p:cSld>
-  <p:clrMapOvr>
-    <a:masterClrMapping/>
-  </p:clrMapOvr>
-</p:sld>
-</file>
-
-<file path=ppt/slides/slide2.xml><?xml version="1.0" encoding="utf-8"?>
-<p:sld xmlns:a="http://schemas.openxmlformats.org/drawingml/2006/main" xmlns:r="http://schemas.openxmlformats.org/officeDocument/2006/relationships" xmlns:p="http://schemas.openxmlformats.org/presentationml/2006/main">
-  <p:cSld>
-    <p:spTree>
-      <p:nvGrpSpPr>
-        <p:cNvPr id="1" name=""/>
-        <p:cNvGrpSpPr/>
-        <p:nvPr/>
-      </p:nvGrpSpPr>
-      <p:grpSpPr>
-        <a:xfrm>
-          <a:off x="0" y="0"/>
-          <a:ext cx="0" cy="0"/>
-          <a:chOff x="0" y="0"/>
-          <a:chExt cx="0" cy="0"/>
-        </a:xfrm>
-      </p:grpSpPr>
-      <p:sp>
-        <p:nvSpPr>
-          <p:cNvPr id="33" name="Rectangle 32">
-            <a:extLst>
-              <a:ext uri="{FF2B5EF4-FFF2-40B4-BE49-F238E27FC236}">
-                <a16:creationId xmlns:a16="http://schemas.microsoft.com/office/drawing/2014/main" id="{74EECCD4-CF38-401E-AECF-93470F42A4BC}"/>
-              </a:ext>
-            </a:extLst>
-          </p:cNvPr>
-          <p:cNvSpPr/>
-          <p:nvPr/>
-        </p:nvSpPr>
-        <p:spPr>
-          <a:xfrm>
-            <a:off x="4702660" y="528289"/>
-            <a:ext cx="1650999" cy="1136067"/>
-          </a:xfrm>
-          <a:prstGeom prst="rect">
-            <a:avLst/>
-          </a:prstGeom>
-          <a:solidFill>
-            <a:schemeClr val="bg2">
-              <a:lumMod val="25000"/>
-              <a:alpha val="5000"/>
-            </a:schemeClr>
-          </a:solidFill>
-          <a:ln>
-            <a:solidFill>
-              <a:schemeClr val="bg2">
-                <a:lumMod val="25000"/>
-              </a:schemeClr>
-            </a:solidFill>
-          </a:ln>
-        </p:spPr>
-        <p:style>
-          <a:lnRef idx="2">
-            <a:schemeClr val="accent1">
-              <a:shade val="50000"/>
-            </a:schemeClr>
-          </a:lnRef>
-          <a:fillRef idx="1">
-            <a:schemeClr val="accent1"/>
-          </a:fillRef>
-          <a:effectRef idx="0">
-            <a:schemeClr val="accent1"/>
-          </a:effectRef>
-          <a:fontRef idx="minor">
-            <a:schemeClr val="lt1"/>
-          </a:fontRef>
-        </p:style>
-        <p:txBody>
-          <a:bodyPr rot="0" spcFirstLastPara="0" vertOverflow="overflow" horzOverflow="overflow" vert="horz" wrap="square" lIns="25400" tIns="12700" rIns="25400" bIns="12700" numCol="1" spcCol="0" rtlCol="0" fromWordArt="0" anchor="ctr" anchorCtr="0" forceAA="0" compatLnSpc="1">
-            <a:prstTxWarp prst="textNoShape">
-              <a:avLst/>
-            </a:prstTxWarp>
-            <a:noAutofit/>
-          </a:bodyPr>
-          <a:lstStyle/>
-          <a:p>
-            <a:pPr algn="ctr"/>
-            <a:endParaRPr lang="en-US" sz="500" dirty="0"/>
-          </a:p>
-        </p:txBody>
-      </p:sp>
-      <p:sp>
-        <p:nvSpPr>
-          <p:cNvPr id="3" name="Rectangle 2">
-            <a:extLst>
-              <a:ext uri="{FF2B5EF4-FFF2-40B4-BE49-F238E27FC236}">
-                <a16:creationId xmlns:a16="http://schemas.microsoft.com/office/drawing/2014/main" id="{B7924044-2BDB-44D2-ACE9-161B03224E8D}"/>
-              </a:ext>
-            </a:extLst>
-          </p:cNvPr>
-          <p:cNvSpPr/>
-          <p:nvPr/>
-        </p:nvSpPr>
-        <p:spPr>
-          <a:xfrm>
-            <a:off x="3734573" y="586512"/>
-            <a:ext cx="544945" cy="383309"/>
-          </a:xfrm>
-          <a:prstGeom prst="rect">
-            <a:avLst/>
-          </a:prstGeom>
-          <a:solidFill>
-            <a:schemeClr val="bg2">
-              <a:lumMod val="90000"/>
-              <a:alpha val="30000"/>
-            </a:schemeClr>
-          </a:solidFill>
-          <a:ln w="22225">
-            <a:solidFill>
-              <a:schemeClr val="tx1"/>
-            </a:solidFill>
-          </a:ln>
-        </p:spPr>
-        <p:style>
-          <a:lnRef idx="2">
-            <a:schemeClr val="accent1">
-              <a:shade val="50000"/>
-            </a:schemeClr>
-          </a:lnRef>
-          <a:fillRef idx="1">
-            <a:schemeClr val="accent1"/>
-          </a:fillRef>
-          <a:effectRef idx="0">
-            <a:schemeClr val="accent1"/>
-          </a:effectRef>
-          <a:fontRef idx="minor">
-            <a:schemeClr val="lt1"/>
-          </a:fontRef>
-        </p:style>
-        <p:txBody>
-          <a:bodyPr rot="0" spcFirstLastPara="0" vertOverflow="overflow" horzOverflow="overflow" vert="horz" wrap="square" lIns="25400" tIns="12700" rIns="25400" bIns="12700" numCol="1" spcCol="0" rtlCol="0" fromWordArt="0" anchor="ctr" anchorCtr="0" forceAA="0" compatLnSpc="1">
-            <a:prstTxWarp prst="textNoShape">
-              <a:avLst/>
-            </a:prstTxWarp>
-            <a:noAutofit/>
-          </a:bodyPr>
-          <a:lstStyle/>
-          <a:p>
-            <a:pPr algn="ctr"/>
-            <a:r>
-              <a:rPr lang="en-US" sz="500" dirty="0">
-                <a:solidFill>
-                  <a:schemeClr val="tx1"/>
-                </a:solidFill>
-              </a:rPr>
-              <a:t>LLVM IR</a:t>
-            </a:r>
-          </a:p>
-          <a:p>
-            <a:pPr algn="ctr"/>
-            <a:r>
-              <a:rPr lang="en-US" sz="500" dirty="0">
-                <a:solidFill>
-                  <a:schemeClr val="tx1"/>
-                </a:solidFill>
-              </a:rPr>
-              <a:t>Program</a:t>
-            </a:r>
-          </a:p>
-        </p:txBody>
-      </p:sp>
-      <p:sp>
-        <p:nvSpPr>
-          <p:cNvPr id="38" name="Rectangle 37">
-            <a:extLst>
-              <a:ext uri="{FF2B5EF4-FFF2-40B4-BE49-F238E27FC236}">
-                <a16:creationId xmlns:a16="http://schemas.microsoft.com/office/drawing/2014/main" id="{C9AD1F5A-91A8-4AFE-9928-651CFC6548B0}"/>
-              </a:ext>
-            </a:extLst>
-          </p:cNvPr>
-          <p:cNvSpPr/>
-          <p:nvPr/>
-        </p:nvSpPr>
-        <p:spPr>
-          <a:xfrm>
-            <a:off x="3734573" y="1212277"/>
-            <a:ext cx="544945" cy="383309"/>
-          </a:xfrm>
-          <a:prstGeom prst="rect">
-            <a:avLst/>
-          </a:prstGeom>
-          <a:solidFill>
-            <a:srgbClr val="FDDF03">
-              <a:alpha val="29804"/>
-            </a:srgbClr>
-          </a:solidFill>
-          <a:ln w="22225">
-            <a:solidFill>
-              <a:schemeClr val="tx1"/>
-            </a:solidFill>
-          </a:ln>
-        </p:spPr>
-        <p:style>
-          <a:lnRef idx="2">
-            <a:schemeClr val="accent1">
-              <a:shade val="50000"/>
-            </a:schemeClr>
-          </a:lnRef>
-          <a:fillRef idx="1">
-            <a:schemeClr val="accent1"/>
-          </a:fillRef>
-          <a:effectRef idx="0">
-            <a:schemeClr val="accent1"/>
-          </a:effectRef>
-          <a:fontRef idx="minor">
-            <a:schemeClr val="lt1"/>
-          </a:fontRef>
-        </p:style>
-        <p:txBody>
-          <a:bodyPr rot="0" spcFirstLastPara="0" vertOverflow="overflow" horzOverflow="overflow" vert="horz" wrap="square" lIns="25400" tIns="12700" rIns="25400" bIns="12700" numCol="1" spcCol="0" rtlCol="0" fromWordArt="0" anchor="ctr" anchorCtr="0" forceAA="0" compatLnSpc="1">
-            <a:prstTxWarp prst="textNoShape">
-              <a:avLst/>
-            </a:prstTxWarp>
-            <a:noAutofit/>
-          </a:bodyPr>
-          <a:lstStyle/>
-          <a:p>
-            <a:pPr algn="ctr"/>
-            <a:r>
-              <a:rPr lang="en-US" sz="500" dirty="0">
-                <a:solidFill>
-                  <a:schemeClr val="tx1"/>
-                </a:solidFill>
-              </a:rPr>
-              <a:t>SE Engine</a:t>
-            </a:r>
-          </a:p>
-        </p:txBody>
-      </p:sp>
-      <p:sp>
-        <p:nvSpPr>
-          <p:cNvPr id="39" name="Rectangle 38">
-            <a:extLst>
-              <a:ext uri="{FF2B5EF4-FFF2-40B4-BE49-F238E27FC236}">
-                <a16:creationId xmlns:a16="http://schemas.microsoft.com/office/drawing/2014/main" id="{F18DC31B-8FAF-4796-A068-48E9FBC01E7D}"/>
-              </a:ext>
-            </a:extLst>
-          </p:cNvPr>
-          <p:cNvSpPr/>
-          <p:nvPr/>
-        </p:nvSpPr>
-        <p:spPr>
-          <a:xfrm>
-            <a:off x="4756731" y="1212277"/>
-            <a:ext cx="544945" cy="383309"/>
-          </a:xfrm>
-          <a:prstGeom prst="rect">
-            <a:avLst/>
-          </a:prstGeom>
-          <a:solidFill>
-            <a:srgbClr val="3371D5">
-              <a:alpha val="29804"/>
-            </a:srgbClr>
-          </a:solidFill>
-          <a:ln w="22225">
-            <a:solidFill>
-              <a:schemeClr val="tx1">
-                <a:alpha val="93000"/>
-              </a:schemeClr>
-            </a:solidFill>
-          </a:ln>
-        </p:spPr>
-        <p:style>
-          <a:lnRef idx="2">
-            <a:schemeClr val="accent1">
-              <a:shade val="50000"/>
-            </a:schemeClr>
-          </a:lnRef>
-          <a:fillRef idx="1">
-            <a:schemeClr val="accent1"/>
-          </a:fillRef>
-          <a:effectRef idx="0">
-            <a:schemeClr val="accent1"/>
-          </a:effectRef>
-          <a:fontRef idx="minor">
-            <a:schemeClr val="lt1"/>
-          </a:fontRef>
-        </p:style>
-        <p:txBody>
-          <a:bodyPr rot="0" spcFirstLastPara="0" vertOverflow="overflow" horzOverflow="overflow" vert="horz" wrap="square" lIns="25400" tIns="12700" rIns="25400" bIns="12700" numCol="1" spcCol="0" rtlCol="0" fromWordArt="0" anchor="ctr" anchorCtr="0" forceAA="0" compatLnSpc="1">
-            <a:prstTxWarp prst="textNoShape">
-              <a:avLst/>
-            </a:prstTxWarp>
-            <a:noAutofit/>
-          </a:bodyPr>
-          <a:lstStyle/>
-          <a:p>
-            <a:pPr algn="ctr"/>
-            <a:r>
-              <a:rPr lang="en-US" sz="500" dirty="0">
-                <a:solidFill>
-                  <a:schemeClr val="tx1"/>
-                </a:solidFill>
-              </a:rPr>
-              <a:t>Proof Script</a:t>
-            </a:r>
-          </a:p>
-        </p:txBody>
-      </p:sp>
-      <p:sp>
-        <p:nvSpPr>
-          <p:cNvPr id="49" name="Rectangle 48">
-            <a:extLst>
-              <a:ext uri="{FF2B5EF4-FFF2-40B4-BE49-F238E27FC236}">
-                <a16:creationId xmlns:a16="http://schemas.microsoft.com/office/drawing/2014/main" id="{20E6DCC3-14A4-4537-98F6-3E354E907050}"/>
-              </a:ext>
-            </a:extLst>
-          </p:cNvPr>
-          <p:cNvSpPr/>
-          <p:nvPr/>
-        </p:nvSpPr>
-        <p:spPr>
-          <a:xfrm>
-            <a:off x="4756729" y="586511"/>
-            <a:ext cx="544945" cy="383309"/>
-          </a:xfrm>
-          <a:prstGeom prst="rect">
-            <a:avLst/>
-          </a:prstGeom>
-          <a:solidFill>
-            <a:srgbClr val="3371D5">
-              <a:alpha val="29804"/>
-            </a:srgbClr>
-          </a:solidFill>
-          <a:ln w="22225">
-            <a:solidFill>
-              <a:schemeClr val="tx1">
-                <a:alpha val="93000"/>
-              </a:schemeClr>
-            </a:solidFill>
-          </a:ln>
-        </p:spPr>
-        <p:style>
-          <a:lnRef idx="2">
-            <a:schemeClr val="accent1">
-              <a:shade val="50000"/>
-            </a:schemeClr>
-          </a:lnRef>
-          <a:fillRef idx="1">
-            <a:schemeClr val="accent1"/>
-          </a:fillRef>
-          <a:effectRef idx="0">
-            <a:schemeClr val="accent1"/>
-          </a:effectRef>
-          <a:fontRef idx="minor">
-            <a:schemeClr val="lt1"/>
-          </a:fontRef>
-        </p:style>
-        <p:txBody>
-          <a:bodyPr rot="0" spcFirstLastPara="0" vertOverflow="overflow" horzOverflow="overflow" vert="horz" wrap="square" lIns="25400" tIns="12700" rIns="25400" bIns="12700" numCol="1" spcCol="0" rtlCol="0" fromWordArt="0" anchor="ctr" anchorCtr="0" forceAA="0" compatLnSpc="1">
-            <a:prstTxWarp prst="textNoShape">
-              <a:avLst/>
-            </a:prstTxWarp>
-            <a:noAutofit/>
-          </a:bodyPr>
-          <a:lstStyle/>
-          <a:p>
-            <a:pPr algn="ctr"/>
-            <a:r>
-              <a:rPr lang="en-US" sz="500" dirty="0">
-                <a:solidFill>
-                  <a:schemeClr val="tx1"/>
-                </a:solidFill>
-              </a:rPr>
-              <a:t>Theoretical</a:t>
-            </a:r>
-          </a:p>
-          <a:p>
-            <a:pPr algn="ctr"/>
-            <a:r>
-              <a:rPr lang="en-US" sz="500" dirty="0">
-                <a:solidFill>
-                  <a:schemeClr val="tx1"/>
-                </a:solidFill>
-              </a:rPr>
-              <a:t>Framework</a:t>
-            </a:r>
-          </a:p>
-        </p:txBody>
-      </p:sp>
-      <p:sp>
-        <p:nvSpPr>
-          <p:cNvPr id="50" name="Rectangle 49">
-            <a:extLst>
-              <a:ext uri="{FF2B5EF4-FFF2-40B4-BE49-F238E27FC236}">
-                <a16:creationId xmlns:a16="http://schemas.microsoft.com/office/drawing/2014/main" id="{ECF798E2-BCBB-4C83-8DAD-28B4CA242422}"/>
-              </a:ext>
-            </a:extLst>
-          </p:cNvPr>
-          <p:cNvSpPr/>
-          <p:nvPr/>
-        </p:nvSpPr>
-        <p:spPr>
-          <a:xfrm>
-            <a:off x="5753487" y="1212277"/>
-            <a:ext cx="544945" cy="383309"/>
-          </a:xfrm>
-          <a:prstGeom prst="rect">
-            <a:avLst/>
-          </a:prstGeom>
-          <a:solidFill>
-            <a:srgbClr val="3371D5">
-              <a:alpha val="29804"/>
-            </a:srgbClr>
-          </a:solidFill>
-          <a:ln w="22225">
-            <a:solidFill>
-              <a:schemeClr val="tx1">
-                <a:alpha val="93000"/>
-              </a:schemeClr>
-            </a:solidFill>
-          </a:ln>
-        </p:spPr>
-        <p:style>
-          <a:lnRef idx="2">
-            <a:schemeClr val="accent1">
-              <a:shade val="50000"/>
-            </a:schemeClr>
-          </a:lnRef>
-          <a:fillRef idx="1">
-            <a:schemeClr val="accent1"/>
-          </a:fillRef>
-          <a:effectRef idx="0">
-            <a:schemeClr val="accent1"/>
-          </a:effectRef>
-          <a:fontRef idx="minor">
-            <a:schemeClr val="lt1"/>
-          </a:fontRef>
-        </p:style>
-        <p:txBody>
-          <a:bodyPr rot="0" spcFirstLastPara="0" vertOverflow="overflow" horzOverflow="overflow" vert="horz" wrap="square" lIns="25400" tIns="12700" rIns="25400" bIns="12700" numCol="1" spcCol="0" rtlCol="0" fromWordArt="0" anchor="ctr" anchorCtr="0" forceAA="0" compatLnSpc="1">
-            <a:prstTxWarp prst="textNoShape">
-              <a:avLst/>
-            </a:prstTxWarp>
-            <a:noAutofit/>
-          </a:bodyPr>
-          <a:lstStyle/>
-          <a:p>
-            <a:pPr algn="ctr"/>
-            <a:r>
-              <a:rPr lang="en-US" sz="500" dirty="0">
-                <a:solidFill>
-                  <a:schemeClr val="tx1"/>
-                </a:solidFill>
-              </a:rPr>
-              <a:t>Proof Assistant</a:t>
-            </a:r>
-          </a:p>
-        </p:txBody>
-      </p:sp>
-      <p:cxnSp>
-        <p:nvCxnSpPr>
-          <p:cNvPr id="4" name="Straight Arrow Connector 3">
-            <a:extLst>
-              <a:ext uri="{FF2B5EF4-FFF2-40B4-BE49-F238E27FC236}">
-                <a16:creationId xmlns:a16="http://schemas.microsoft.com/office/drawing/2014/main" id="{81E4F6B5-572F-433A-B66B-8CEF3D67F9A2}"/>
-              </a:ext>
-            </a:extLst>
-          </p:cNvPr>
-          <p:cNvCxnSpPr>
-            <a:cxnSpLocks/>
-            <a:stCxn id="3" idx="2"/>
-            <a:endCxn id="38" idx="0"/>
-          </p:cNvCxnSpPr>
-          <p:nvPr/>
-        </p:nvCxnSpPr>
-        <p:spPr>
-          <a:xfrm>
-            <a:off x="4007043" y="969820"/>
-            <a:ext cx="0" cy="242457"/>
-          </a:xfrm>
-          <a:prstGeom prst="straightConnector1">
-            <a:avLst/>
-          </a:prstGeom>
-          <a:ln w="31750">
-            <a:solidFill>
-              <a:schemeClr val="tx1"/>
-            </a:solidFill>
-            <a:tailEnd type="triangle"/>
-          </a:ln>
-        </p:spPr>
-        <p:style>
-          <a:lnRef idx="1">
-            <a:schemeClr val="accent1"/>
-          </a:lnRef>
-          <a:fillRef idx="0">
-            <a:schemeClr val="accent1"/>
-          </a:fillRef>
-          <a:effectRef idx="0">
-            <a:schemeClr val="accent1"/>
-          </a:effectRef>
-          <a:fontRef idx="minor">
-            <a:schemeClr val="tx1"/>
-          </a:fontRef>
-        </p:style>
-      </p:cxnSp>
-      <p:cxnSp>
-        <p:nvCxnSpPr>
-          <p:cNvPr id="17" name="Straight Arrow Connector 16">
-            <a:extLst>
-              <a:ext uri="{FF2B5EF4-FFF2-40B4-BE49-F238E27FC236}">
-                <a16:creationId xmlns:a16="http://schemas.microsoft.com/office/drawing/2014/main" id="{1657A0AC-DF40-485C-B08F-A874486F42C5}"/>
-              </a:ext>
-            </a:extLst>
-          </p:cNvPr>
-          <p:cNvCxnSpPr>
-            <a:cxnSpLocks/>
-            <a:stCxn id="39" idx="3"/>
-            <a:endCxn id="50" idx="1"/>
-          </p:cNvCxnSpPr>
-          <p:nvPr/>
-        </p:nvCxnSpPr>
-        <p:spPr>
-          <a:xfrm>
-            <a:off x="5301674" y="1403928"/>
-            <a:ext cx="451813" cy="0"/>
-          </a:xfrm>
-          <a:prstGeom prst="straightConnector1">
-            <a:avLst/>
-          </a:prstGeom>
-          <a:ln w="31750">
-            <a:solidFill>
-              <a:schemeClr val="tx1"/>
-            </a:solidFill>
-            <a:tailEnd type="triangle"/>
-          </a:ln>
-        </p:spPr>
-        <p:style>
-          <a:lnRef idx="1">
-            <a:schemeClr val="accent1"/>
-          </a:lnRef>
-          <a:fillRef idx="0">
-            <a:schemeClr val="accent1"/>
-          </a:fillRef>
-          <a:effectRef idx="0">
-            <a:schemeClr val="accent1"/>
-          </a:effectRef>
-          <a:fontRef idx="minor">
-            <a:schemeClr val="tx1"/>
-          </a:fontRef>
-        </p:style>
-      </p:cxnSp>
-      <p:cxnSp>
-        <p:nvCxnSpPr>
-          <p:cNvPr id="20" name="Straight Arrow Connector 19">
-            <a:extLst>
-              <a:ext uri="{FF2B5EF4-FFF2-40B4-BE49-F238E27FC236}">
-                <a16:creationId xmlns:a16="http://schemas.microsoft.com/office/drawing/2014/main" id="{2388359E-B428-4DD4-9910-EA5F12A75135}"/>
-              </a:ext>
-            </a:extLst>
-          </p:cNvPr>
-          <p:cNvCxnSpPr>
-            <a:cxnSpLocks/>
-            <a:stCxn id="39" idx="0"/>
-            <a:endCxn id="49" idx="2"/>
-          </p:cNvCxnSpPr>
-          <p:nvPr/>
-        </p:nvCxnSpPr>
-        <p:spPr>
-          <a:xfrm flipH="1" flipV="1">
-            <a:off x="5029203" y="969819"/>
-            <a:ext cx="1" cy="242456"/>
-          </a:xfrm>
-          <a:prstGeom prst="straightConnector1">
-            <a:avLst/>
-          </a:prstGeom>
-          <a:ln w="31750">
-            <a:solidFill>
-              <a:schemeClr val="tx1"/>
-            </a:solidFill>
-            <a:tailEnd type="triangle"/>
-          </a:ln>
-        </p:spPr>
-        <p:style>
-          <a:lnRef idx="1">
-            <a:schemeClr val="accent1"/>
-          </a:lnRef>
-          <a:fillRef idx="0">
-            <a:schemeClr val="accent1"/>
-          </a:fillRef>
-          <a:effectRef idx="0">
-            <a:schemeClr val="accent1"/>
-          </a:effectRef>
-          <a:fontRef idx="minor">
-            <a:schemeClr val="tx1"/>
-          </a:fontRef>
-        </p:style>
-      </p:cxnSp>
-      <p:sp>
-        <p:nvSpPr>
-          <p:cNvPr id="18" name="TextBox 17">
-            <a:extLst>
-              <a:ext uri="{FF2B5EF4-FFF2-40B4-BE49-F238E27FC236}">
-                <a16:creationId xmlns:a16="http://schemas.microsoft.com/office/drawing/2014/main" id="{E6A86062-404C-497E-9FDB-5A1D3AB091EB}"/>
-              </a:ext>
-            </a:extLst>
-          </p:cNvPr>
-          <p:cNvSpPr txBox="1"/>
-          <p:nvPr/>
-        </p:nvSpPr>
-        <p:spPr>
-          <a:xfrm>
-            <a:off x="4353986" y="1276436"/>
-            <a:ext cx="328277" cy="246221"/>
-          </a:xfrm>
-          <a:prstGeom prst="rect">
-            <a:avLst/>
-          </a:prstGeom>
-          <a:noFill/>
-        </p:spPr>
-        <p:txBody>
-          <a:bodyPr wrap="square" rtlCol="0">
-            <a:spAutoFit/>
-          </a:bodyPr>
-          <a:lstStyle/>
-          <a:p>
-            <a:pPr algn="ctr"/>
-            <a:r>
-              <a:rPr lang="en-US" sz="500" i="1" dirty="0"/>
-              <a:t>generate</a:t>
-            </a:r>
-          </a:p>
-        </p:txBody>
-      </p:sp>
-      <p:sp>
-        <p:nvSpPr>
-          <p:cNvPr id="28" name="TextBox 27">
-            <a:extLst>
-              <a:ext uri="{FF2B5EF4-FFF2-40B4-BE49-F238E27FC236}">
-                <a16:creationId xmlns:a16="http://schemas.microsoft.com/office/drawing/2014/main" id="{FC6B429D-D41B-4C33-A463-22AD0013CF6F}"/>
-              </a:ext>
-            </a:extLst>
-          </p:cNvPr>
-          <p:cNvSpPr txBox="1"/>
-          <p:nvPr/>
-        </p:nvSpPr>
-        <p:spPr>
-          <a:xfrm>
-            <a:off x="5363443" y="1276436"/>
-            <a:ext cx="328277" cy="246221"/>
-          </a:xfrm>
-          <a:prstGeom prst="rect">
-            <a:avLst/>
-          </a:prstGeom>
-          <a:noFill/>
-        </p:spPr>
-        <p:txBody>
-          <a:bodyPr wrap="square" rtlCol="0">
-            <a:spAutoFit/>
-          </a:bodyPr>
-          <a:lstStyle/>
-          <a:p>
-            <a:pPr algn="ctr"/>
-            <a:r>
-              <a:rPr lang="en-US" sz="500" i="1" dirty="0"/>
-              <a:t>validate</a:t>
-            </a:r>
-          </a:p>
-        </p:txBody>
-      </p:sp>
-      <p:sp>
-        <p:nvSpPr>
-          <p:cNvPr id="29" name="TextBox 28">
-            <a:extLst>
-              <a:ext uri="{FF2B5EF4-FFF2-40B4-BE49-F238E27FC236}">
-                <a16:creationId xmlns:a16="http://schemas.microsoft.com/office/drawing/2014/main" id="{593A9B25-8353-4641-AF2B-A5D3EE7870FF}"/>
-              </a:ext>
-            </a:extLst>
-          </p:cNvPr>
-          <p:cNvSpPr txBox="1"/>
-          <p:nvPr/>
-        </p:nvSpPr>
-        <p:spPr>
-          <a:xfrm>
-            <a:off x="4996490" y="1043629"/>
-            <a:ext cx="328277" cy="246221"/>
-          </a:xfrm>
-          <a:prstGeom prst="rect">
-            <a:avLst/>
-          </a:prstGeom>
-          <a:noFill/>
-        </p:spPr>
-        <p:txBody>
-          <a:bodyPr wrap="square" rtlCol="0">
-            <a:spAutoFit/>
-          </a:bodyPr>
-          <a:lstStyle/>
-          <a:p>
-            <a:pPr algn="ctr"/>
-            <a:r>
-              <a:rPr lang="en-US" sz="500" i="1" dirty="0"/>
-              <a:t>import</a:t>
-            </a:r>
-          </a:p>
-        </p:txBody>
-      </p:sp>
-      <p:sp>
-        <p:nvSpPr>
-          <p:cNvPr id="32" name="TextBox 31">
-            <a:extLst>
-              <a:ext uri="{FF2B5EF4-FFF2-40B4-BE49-F238E27FC236}">
-                <a16:creationId xmlns:a16="http://schemas.microsoft.com/office/drawing/2014/main" id="{369DA32F-54EB-429B-BABF-63F05EE3D666}"/>
-              </a:ext>
-            </a:extLst>
-          </p:cNvPr>
-          <p:cNvSpPr txBox="1"/>
-          <p:nvPr/>
-        </p:nvSpPr>
-        <p:spPr>
-          <a:xfrm>
-            <a:off x="5367290" y="1689754"/>
-            <a:ext cx="328277" cy="297646"/>
-          </a:xfrm>
-          <a:prstGeom prst="rect">
-            <a:avLst/>
-          </a:prstGeom>
-          <a:noFill/>
-        </p:spPr>
-        <p:txBody>
-          <a:bodyPr wrap="square" rtlCol="0">
-            <a:spAutoFit/>
-          </a:bodyPr>
-          <a:lstStyle/>
-          <a:p>
-            <a:pPr algn="ctr"/>
-            <a:r>
-              <a:rPr lang="en-US" sz="667" i="1" dirty="0" err="1"/>
-              <a:t>Rocq</a:t>
-            </a:r>
-            <a:endParaRPr lang="en-US" sz="667" i="1" dirty="0"/>
-          </a:p>
-        </p:txBody>
-      </p:sp>
-      <p:cxnSp>
-        <p:nvCxnSpPr>
-          <p:cNvPr id="12" name="Straight Arrow Connector 11">
-            <a:extLst>
-              <a:ext uri="{FF2B5EF4-FFF2-40B4-BE49-F238E27FC236}">
-                <a16:creationId xmlns:a16="http://schemas.microsoft.com/office/drawing/2014/main" id="{03D51144-5578-44AF-BF88-D04F88444819}"/>
-              </a:ext>
-            </a:extLst>
-          </p:cNvPr>
-          <p:cNvCxnSpPr>
-            <a:cxnSpLocks/>
-            <a:stCxn id="38" idx="3"/>
-            <a:endCxn id="39" idx="1"/>
-          </p:cNvCxnSpPr>
-          <p:nvPr/>
-        </p:nvCxnSpPr>
-        <p:spPr>
-          <a:xfrm flipV="1">
-            <a:off x="4279519" y="1403932"/>
-            <a:ext cx="477213" cy="1"/>
-          </a:xfrm>
-          <a:prstGeom prst="straightConnector1">
-            <a:avLst/>
-          </a:prstGeom>
-          <a:ln w="31750">
-            <a:solidFill>
-              <a:schemeClr val="tx1"/>
-            </a:solidFill>
-            <a:tailEnd type="triangle"/>
-          </a:ln>
-        </p:spPr>
-        <p:style>
-          <a:lnRef idx="1">
-            <a:schemeClr val="accent1"/>
-          </a:lnRef>
-          <a:fillRef idx="0">
-            <a:schemeClr val="accent1"/>
-          </a:fillRef>
-          <a:effectRef idx="0">
-            <a:schemeClr val="accent1"/>
-          </a:effectRef>
-          <a:fontRef idx="minor">
-            <a:schemeClr val="tx1"/>
-          </a:fontRef>
-        </p:style>
-      </p:cxnSp>
-    </p:spTree>
-    <p:extLst>
-      <p:ext uri="{BB962C8B-B14F-4D97-AF65-F5344CB8AC3E}">
-        <p14:creationId xmlns:p14="http://schemas.microsoft.com/office/powerpoint/2010/main" val="3729777158"/>
-      </p:ext>
-    </p:extLst>
-  </p:cSld>
-  <p:clrMapOvr>
-    <a:masterClrMapping/>
-  </p:clrMapOvr>
-</p:sld>
-</file>
-
-<file path=ppt/slides/slide3.xml><?xml version="1.0" encoding="utf-8"?>
-<p:sld xmlns:a="http://schemas.openxmlformats.org/drawingml/2006/main" xmlns:r="http://schemas.openxmlformats.org/officeDocument/2006/relationships" xmlns:p="http://schemas.openxmlformats.org/presentationml/2006/main">
-  <p:cSld>
-    <p:spTree>
-      <p:nvGrpSpPr>
-        <p:cNvPr id="1" name=""/>
-        <p:cNvGrpSpPr/>
-        <p:nvPr/>
-      </p:nvGrpSpPr>
-      <p:grpSpPr>
-        <a:xfrm>
-          <a:off x="0" y="0"/>
-          <a:ext cx="0" cy="0"/>
-          <a:chOff x="0" y="0"/>
-          <a:chExt cx="0" cy="0"/>
-        </a:xfrm>
-      </p:grpSpPr>
-      <p:sp>
-        <p:nvSpPr>
-          <p:cNvPr id="3" name="Rectangle 2">
-            <a:extLst>
-              <a:ext uri="{FF2B5EF4-FFF2-40B4-BE49-F238E27FC236}">
-                <a16:creationId xmlns:a16="http://schemas.microsoft.com/office/drawing/2014/main" id="{B7924044-2BDB-44D2-ACE9-161B03224E8D}"/>
-              </a:ext>
-            </a:extLst>
-          </p:cNvPr>
-          <p:cNvSpPr/>
-          <p:nvPr/>
-        </p:nvSpPr>
-        <p:spPr>
-          <a:xfrm>
-            <a:off x="3139830" y="303725"/>
-            <a:ext cx="884917" cy="637001"/>
-          </a:xfrm>
-          <a:prstGeom prst="rect">
-            <a:avLst/>
-          </a:prstGeom>
-          <a:solidFill>
-            <a:schemeClr val="bg2">
-              <a:lumMod val="90000"/>
-              <a:alpha val="30000"/>
-            </a:schemeClr>
-          </a:solidFill>
-          <a:ln w="22225">
-            <a:solidFill>
-              <a:schemeClr val="tx1"/>
-            </a:solidFill>
-          </a:ln>
-        </p:spPr>
-        <p:style>
-          <a:lnRef idx="2">
-            <a:schemeClr val="accent1">
-              <a:shade val="50000"/>
-            </a:schemeClr>
-          </a:lnRef>
-          <a:fillRef idx="1">
-            <a:schemeClr val="accent1"/>
-          </a:fillRef>
-          <a:effectRef idx="0">
-            <a:schemeClr val="accent1"/>
-          </a:effectRef>
-          <a:fontRef idx="minor">
-            <a:schemeClr val="lt1"/>
-          </a:fontRef>
-        </p:style>
-        <p:txBody>
-          <a:bodyPr rot="0" spcFirstLastPara="0" vertOverflow="overflow" horzOverflow="overflow" vert="horz" wrap="square" lIns="25400" tIns="12700" rIns="25400" bIns="12700" numCol="1" spcCol="0" rtlCol="0" fromWordArt="0" anchor="ctr" anchorCtr="0" forceAA="0" compatLnSpc="1">
-            <a:prstTxWarp prst="textNoShape">
-              <a:avLst/>
-            </a:prstTxWarp>
-            <a:noAutofit/>
-          </a:bodyPr>
-          <a:lstStyle/>
-          <a:p>
-            <a:pPr algn="ctr"/>
-            <a:r>
-              <a:rPr lang="en-US" sz="800" dirty="0">
-                <a:solidFill>
-                  <a:schemeClr val="tx1"/>
-                </a:solidFill>
-              </a:rPr>
-              <a:t>LLVM IR</a:t>
-            </a:r>
-          </a:p>
-          <a:p>
-            <a:pPr algn="ctr"/>
-            <a:r>
-              <a:rPr lang="en-US" sz="800" dirty="0">
-                <a:solidFill>
-                  <a:schemeClr val="tx1"/>
-                </a:solidFill>
-              </a:rPr>
-              <a:t>Program</a:t>
-            </a:r>
-          </a:p>
-        </p:txBody>
-      </p:sp>
-      <p:sp>
-        <p:nvSpPr>
-          <p:cNvPr id="40" name="Rectangle 39">
-            <a:extLst>
-              <a:ext uri="{FF2B5EF4-FFF2-40B4-BE49-F238E27FC236}">
-                <a16:creationId xmlns:a16="http://schemas.microsoft.com/office/drawing/2014/main" id="{4FDA865E-C8F8-4876-B867-2434D46A804E}"/>
-              </a:ext>
-            </a:extLst>
-          </p:cNvPr>
-          <p:cNvSpPr/>
-          <p:nvPr/>
-        </p:nvSpPr>
-        <p:spPr>
-          <a:xfrm>
-            <a:off x="3139830" y="1171019"/>
-            <a:ext cx="884917" cy="637001"/>
-          </a:xfrm>
-          <a:prstGeom prst="rect">
-            <a:avLst/>
-          </a:prstGeom>
-          <a:solidFill>
-            <a:srgbClr val="FDDF03">
-              <a:alpha val="29804"/>
-            </a:srgbClr>
-          </a:solidFill>
-          <a:ln w="22225">
-            <a:solidFill>
-              <a:schemeClr val="tx1"/>
-            </a:solidFill>
-          </a:ln>
-        </p:spPr>
-        <p:style>
-          <a:lnRef idx="2">
-            <a:schemeClr val="accent1">
-              <a:shade val="50000"/>
-            </a:schemeClr>
-          </a:lnRef>
-          <a:fillRef idx="1">
-            <a:schemeClr val="accent1"/>
-          </a:fillRef>
-          <a:effectRef idx="0">
-            <a:schemeClr val="accent1"/>
-          </a:effectRef>
-          <a:fontRef idx="minor">
-            <a:schemeClr val="lt1"/>
-          </a:fontRef>
-        </p:style>
-        <p:txBody>
-          <a:bodyPr rot="0" spcFirstLastPara="0" vertOverflow="overflow" horzOverflow="overflow" vert="horz" wrap="square" lIns="25400" tIns="12700" rIns="25400" bIns="12700" numCol="1" spcCol="0" rtlCol="0" fromWordArt="0" anchor="ctr" anchorCtr="0" forceAA="0" compatLnSpc="1">
-            <a:prstTxWarp prst="textNoShape">
-              <a:avLst/>
-            </a:prstTxWarp>
-            <a:noAutofit/>
-          </a:bodyPr>
-          <a:lstStyle/>
-          <a:p>
-            <a:pPr algn="ctr"/>
-            <a:r>
-              <a:rPr lang="en-US" sz="800" dirty="0">
-                <a:solidFill>
-                  <a:schemeClr val="tx1"/>
-                </a:solidFill>
-              </a:rPr>
-              <a:t>SE Engine</a:t>
-            </a:r>
-          </a:p>
-        </p:txBody>
-      </p:sp>
-      <p:sp>
-        <p:nvSpPr>
-          <p:cNvPr id="43" name="Rectangle 42">
-            <a:extLst>
-              <a:ext uri="{FF2B5EF4-FFF2-40B4-BE49-F238E27FC236}">
-                <a16:creationId xmlns:a16="http://schemas.microsoft.com/office/drawing/2014/main" id="{FD4E7E92-E774-4C7E-ADB6-2A6D4382BFFB}"/>
-              </a:ext>
-            </a:extLst>
-          </p:cNvPr>
-          <p:cNvSpPr/>
-          <p:nvPr/>
-        </p:nvSpPr>
-        <p:spPr>
-          <a:xfrm>
-            <a:off x="4570451" y="1171019"/>
-            <a:ext cx="884917" cy="637001"/>
-          </a:xfrm>
-          <a:prstGeom prst="rect">
-            <a:avLst/>
-          </a:prstGeom>
-          <a:solidFill>
-            <a:srgbClr val="3371D5">
-              <a:alpha val="29804"/>
-            </a:srgbClr>
-          </a:solidFill>
-          <a:ln w="22225">
-            <a:solidFill>
-              <a:schemeClr val="tx1">
-                <a:alpha val="93000"/>
-              </a:schemeClr>
-            </a:solidFill>
-          </a:ln>
-        </p:spPr>
-        <p:style>
-          <a:lnRef idx="2">
-            <a:schemeClr val="accent1">
-              <a:shade val="50000"/>
-            </a:schemeClr>
-          </a:lnRef>
-          <a:fillRef idx="1">
-            <a:schemeClr val="accent1"/>
-          </a:fillRef>
-          <a:effectRef idx="0">
-            <a:schemeClr val="accent1"/>
-          </a:effectRef>
-          <a:fontRef idx="minor">
-            <a:schemeClr val="lt1"/>
-          </a:fontRef>
-        </p:style>
-        <p:txBody>
-          <a:bodyPr rot="0" spcFirstLastPara="0" vertOverflow="overflow" horzOverflow="overflow" vert="horz" wrap="square" lIns="25400" tIns="12700" rIns="25400" bIns="12700" numCol="1" spcCol="0" rtlCol="0" fromWordArt="0" anchor="ctr" anchorCtr="0" forceAA="0" compatLnSpc="1">
-            <a:prstTxWarp prst="textNoShape">
-              <a:avLst/>
-            </a:prstTxWarp>
-            <a:noAutofit/>
-          </a:bodyPr>
-          <a:lstStyle/>
-          <a:p>
-            <a:pPr algn="ctr"/>
-            <a:r>
-              <a:rPr lang="en-US" sz="800" dirty="0">
-                <a:solidFill>
-                  <a:schemeClr val="tx1"/>
-                </a:solidFill>
-              </a:rPr>
-              <a:t>Proof Script</a:t>
-            </a:r>
-          </a:p>
-        </p:txBody>
-      </p:sp>
-      <p:sp>
-        <p:nvSpPr>
-          <p:cNvPr id="46" name="Rectangle 45">
-            <a:extLst>
-              <a:ext uri="{FF2B5EF4-FFF2-40B4-BE49-F238E27FC236}">
-                <a16:creationId xmlns:a16="http://schemas.microsoft.com/office/drawing/2014/main" id="{87E925C8-BD35-4317-9C61-4486132BC63E}"/>
-              </a:ext>
-            </a:extLst>
-          </p:cNvPr>
-          <p:cNvSpPr/>
-          <p:nvPr/>
-        </p:nvSpPr>
-        <p:spPr>
-          <a:xfrm>
-            <a:off x="6001071" y="1178223"/>
-            <a:ext cx="884917" cy="637001"/>
-          </a:xfrm>
-          <a:prstGeom prst="rect">
-            <a:avLst/>
-          </a:prstGeom>
-          <a:solidFill>
-            <a:srgbClr val="3371D5">
-              <a:alpha val="29804"/>
-            </a:srgbClr>
-          </a:solidFill>
-          <a:ln w="22225">
-            <a:solidFill>
-              <a:schemeClr val="tx1">
-                <a:alpha val="93000"/>
-              </a:schemeClr>
-            </a:solidFill>
-          </a:ln>
-        </p:spPr>
-        <p:style>
-          <a:lnRef idx="2">
-            <a:schemeClr val="accent1">
-              <a:shade val="50000"/>
-            </a:schemeClr>
-          </a:lnRef>
-          <a:fillRef idx="1">
-            <a:schemeClr val="accent1"/>
-          </a:fillRef>
-          <a:effectRef idx="0">
-            <a:schemeClr val="accent1"/>
-          </a:effectRef>
-          <a:fontRef idx="minor">
-            <a:schemeClr val="lt1"/>
-          </a:fontRef>
-        </p:style>
-        <p:txBody>
-          <a:bodyPr rot="0" spcFirstLastPara="0" vertOverflow="overflow" horzOverflow="overflow" vert="horz" wrap="square" lIns="25400" tIns="12700" rIns="25400" bIns="12700" numCol="1" spcCol="0" rtlCol="0" fromWordArt="0" anchor="ctr" anchorCtr="0" forceAA="0" compatLnSpc="1">
-            <a:prstTxWarp prst="textNoShape">
-              <a:avLst/>
-            </a:prstTxWarp>
-            <a:noAutofit/>
-          </a:bodyPr>
-          <a:lstStyle/>
-          <a:p>
-            <a:pPr algn="ctr"/>
-            <a:r>
-              <a:rPr lang="en-US" sz="800" dirty="0">
-                <a:solidFill>
-                  <a:schemeClr val="tx1"/>
-                </a:solidFill>
-              </a:rPr>
-              <a:t>Proof Assistant</a:t>
-            </a:r>
-          </a:p>
-        </p:txBody>
-      </p:sp>
-      <p:sp>
-        <p:nvSpPr>
-          <p:cNvPr id="47" name="Rectangle 46">
-            <a:extLst>
-              <a:ext uri="{FF2B5EF4-FFF2-40B4-BE49-F238E27FC236}">
-                <a16:creationId xmlns:a16="http://schemas.microsoft.com/office/drawing/2014/main" id="{5A01D666-973D-4D50-B48E-16D9F77F0E90}"/>
-              </a:ext>
-            </a:extLst>
-          </p:cNvPr>
-          <p:cNvSpPr/>
-          <p:nvPr/>
-        </p:nvSpPr>
-        <p:spPr>
-          <a:xfrm>
-            <a:off x="4570451" y="303725"/>
-            <a:ext cx="884917" cy="637001"/>
-          </a:xfrm>
-          <a:prstGeom prst="rect">
-            <a:avLst/>
-          </a:prstGeom>
-          <a:solidFill>
-            <a:srgbClr val="3371D5">
-              <a:alpha val="29804"/>
-            </a:srgbClr>
-          </a:solidFill>
-          <a:ln w="22225">
-            <a:solidFill>
-              <a:schemeClr val="tx1">
-                <a:alpha val="93000"/>
-              </a:schemeClr>
-            </a:solidFill>
-          </a:ln>
-        </p:spPr>
-        <p:style>
-          <a:lnRef idx="2">
-            <a:schemeClr val="accent1">
-              <a:shade val="50000"/>
-            </a:schemeClr>
-          </a:lnRef>
-          <a:fillRef idx="1">
-            <a:schemeClr val="accent1"/>
-          </a:fillRef>
-          <a:effectRef idx="0">
-            <a:schemeClr val="accent1"/>
-          </a:effectRef>
-          <a:fontRef idx="minor">
-            <a:schemeClr val="lt1"/>
-          </a:fontRef>
-        </p:style>
-        <p:txBody>
-          <a:bodyPr rot="0" spcFirstLastPara="0" vertOverflow="overflow" horzOverflow="overflow" vert="horz" wrap="square" lIns="25400" tIns="12700" rIns="25400" bIns="12700" numCol="1" spcCol="0" rtlCol="0" fromWordArt="0" anchor="ctr" anchorCtr="0" forceAA="0" compatLnSpc="1">
-            <a:prstTxWarp prst="textNoShape">
-              <a:avLst/>
-            </a:prstTxWarp>
-            <a:noAutofit/>
-          </a:bodyPr>
-          <a:lstStyle/>
-          <a:p>
-            <a:pPr algn="ctr"/>
-            <a:r>
-              <a:rPr lang="en-US" sz="800" dirty="0">
-                <a:solidFill>
-                  <a:schemeClr val="tx1"/>
-                </a:solidFill>
-              </a:rPr>
-              <a:t>Theoretical</a:t>
-            </a:r>
-            <a:br>
-              <a:rPr lang="en-US" sz="800" dirty="0">
-                <a:solidFill>
-                  <a:schemeClr val="tx1"/>
-                </a:solidFill>
-              </a:rPr>
-            </a:br>
-            <a:r>
-              <a:rPr lang="en-US" sz="800" dirty="0">
-                <a:solidFill>
-                  <a:schemeClr val="tx1"/>
-                </a:solidFill>
-              </a:rPr>
-              <a:t>Framework</a:t>
-            </a:r>
-          </a:p>
-        </p:txBody>
-      </p:sp>
-      <p:cxnSp>
-        <p:nvCxnSpPr>
-          <p:cNvPr id="48" name="Straight Arrow Connector 47">
-            <a:extLst>
-              <a:ext uri="{FF2B5EF4-FFF2-40B4-BE49-F238E27FC236}">
-                <a16:creationId xmlns:a16="http://schemas.microsoft.com/office/drawing/2014/main" id="{041DFB10-7630-4B5E-9EA2-96E3533920C4}"/>
-              </a:ext>
-            </a:extLst>
-          </p:cNvPr>
-          <p:cNvCxnSpPr>
-            <a:cxnSpLocks/>
-            <a:stCxn id="3" idx="2"/>
-            <a:endCxn id="40" idx="0"/>
-          </p:cNvCxnSpPr>
-          <p:nvPr/>
-        </p:nvCxnSpPr>
-        <p:spPr>
-          <a:xfrm>
-            <a:off x="3582287" y="940725"/>
-            <a:ext cx="0" cy="230293"/>
-          </a:xfrm>
-          <a:prstGeom prst="straightConnector1">
-            <a:avLst/>
-          </a:prstGeom>
-          <a:ln w="31750">
-            <a:solidFill>
-              <a:schemeClr val="tx1"/>
-            </a:solidFill>
-            <a:tailEnd type="triangle"/>
-          </a:ln>
-        </p:spPr>
-        <p:style>
-          <a:lnRef idx="1">
-            <a:schemeClr val="accent1"/>
-          </a:lnRef>
-          <a:fillRef idx="0">
-            <a:schemeClr val="accent1"/>
-          </a:fillRef>
-          <a:effectRef idx="0">
-            <a:schemeClr val="accent1"/>
-          </a:effectRef>
-          <a:fontRef idx="minor">
-            <a:schemeClr val="tx1"/>
-          </a:fontRef>
-        </p:style>
-      </p:cxnSp>
-      <p:cxnSp>
-        <p:nvCxnSpPr>
-          <p:cNvPr id="53" name="Straight Arrow Connector 52">
-            <a:extLst>
-              <a:ext uri="{FF2B5EF4-FFF2-40B4-BE49-F238E27FC236}">
-                <a16:creationId xmlns:a16="http://schemas.microsoft.com/office/drawing/2014/main" id="{9CACD93C-66DB-4D2E-A432-957E5727082A}"/>
-              </a:ext>
-            </a:extLst>
-          </p:cNvPr>
-          <p:cNvCxnSpPr>
-            <a:cxnSpLocks/>
-          </p:cNvCxnSpPr>
-          <p:nvPr/>
-        </p:nvCxnSpPr>
-        <p:spPr>
-          <a:xfrm>
-            <a:off x="4143896" y="1496723"/>
-            <a:ext cx="295490" cy="0"/>
-          </a:xfrm>
-          <a:prstGeom prst="straightConnector1">
-            <a:avLst/>
-          </a:prstGeom>
-          <a:ln w="31750">
-            <a:solidFill>
-              <a:schemeClr val="tx1"/>
-            </a:solidFill>
-            <a:tailEnd type="triangle"/>
-          </a:ln>
-        </p:spPr>
-        <p:style>
-          <a:lnRef idx="1">
-            <a:schemeClr val="accent1"/>
-          </a:lnRef>
-          <a:fillRef idx="0">
-            <a:schemeClr val="accent1"/>
-          </a:fillRef>
-          <a:effectRef idx="0">
-            <a:schemeClr val="accent1"/>
-          </a:effectRef>
-          <a:fontRef idx="minor">
-            <a:schemeClr val="tx1"/>
-          </a:fontRef>
-        </p:style>
-      </p:cxnSp>
-    </p:spTree>
-    <p:extLst>
-      <p:ext uri="{BB962C8B-B14F-4D97-AF65-F5344CB8AC3E}">
-        <p14:creationId xmlns:p14="http://schemas.microsoft.com/office/powerpoint/2010/main" val="896789822"/>
-      </p:ext>
-    </p:extLst>
-  </p:cSld>
-  <p:clrMapOvr>
-    <a:masterClrMapping/>
-  </p:clrMapOvr>
-</p:sld>
-</file>
-
-<file path=ppt/slides/slide4.xml><?xml version="1.0" encoding="utf-8"?>
-<p:sld xmlns:a="http://schemas.openxmlformats.org/drawingml/2006/main" xmlns:r="http://schemas.openxmlformats.org/officeDocument/2006/relationships" xmlns:p="http://schemas.openxmlformats.org/presentationml/2006/main">
-  <p:cSld>
-    <p:spTree>
-      <p:nvGrpSpPr>
-        <p:cNvPr id="1" name=""/>
-        <p:cNvGrpSpPr/>
-        <p:nvPr/>
-      </p:nvGrpSpPr>
-      <p:grpSpPr>
-        <a:xfrm>
-          <a:off x="0" y="0"/>
-          <a:ext cx="0" cy="0"/>
-          <a:chOff x="0" y="0"/>
-          <a:chExt cx="0" cy="0"/>
-        </a:xfrm>
-      </p:grpSpPr>
-      <p:sp>
-        <p:nvSpPr>
           <p:cNvPr id="50" name="Rectangle 49">
             <a:extLst>
               <a:ext uri="{FF2B5EF4-FFF2-40B4-BE49-F238E27FC236}">
@@ -4915,24 +3319,18 @@
           <a:p>
             <a:pPr algn="ctr"/>
             <a:r>
-              <a:rPr lang="en-US" sz="1600" b="1" dirty="0">
-                <a:solidFill>
-                  <a:schemeClr val="tx1"/>
-                </a:solidFill>
-              </a:rPr>
-              <a:t>LLVM IR</a:t>
-            </a:r>
-          </a:p>
-          <a:p>
-            <a:pPr algn="ctr"/>
-            <a:r>
-              <a:rPr lang="en-US" sz="1600" b="1" dirty="0">
+              <a:rPr lang="en-US" sz="1600" b="1">
                 <a:solidFill>
                   <a:schemeClr val="tx1"/>
                 </a:solidFill>
               </a:rPr>
               <a:t>Program</a:t>
             </a:r>
+            <a:endParaRPr lang="en-US">
+              <a:solidFill>
+                <a:schemeClr val="tx1"/>
+              </a:solidFill>
+            </a:endParaRPr>
           </a:p>
         </p:txBody>
       </p:sp>
@@ -5539,100 +3937,6 @@
     <p:extLst>
       <p:ext uri="{BB962C8B-B14F-4D97-AF65-F5344CB8AC3E}">
         <p14:creationId xmlns:p14="http://schemas.microsoft.com/office/powerpoint/2010/main" val="2045650364"/>
-      </p:ext>
-    </p:extLst>
-  </p:cSld>
-  <p:clrMapOvr>
-    <a:masterClrMapping/>
-  </p:clrMapOvr>
-</p:sld>
-</file>
-
-<file path=ppt/slides/slide5.xml><?xml version="1.0" encoding="utf-8"?>
-<p:sld xmlns:a="http://schemas.openxmlformats.org/drawingml/2006/main" xmlns:r="http://schemas.openxmlformats.org/officeDocument/2006/relationships" xmlns:p="http://schemas.openxmlformats.org/presentationml/2006/main">
-  <p:cSld>
-    <p:spTree>
-      <p:nvGrpSpPr>
-        <p:cNvPr id="1" name=""/>
-        <p:cNvGrpSpPr/>
-        <p:nvPr/>
-      </p:nvGrpSpPr>
-      <p:grpSpPr>
-        <a:xfrm>
-          <a:off x="0" y="0"/>
-          <a:ext cx="0" cy="0"/>
-          <a:chOff x="0" y="0"/>
-          <a:chExt cx="0" cy="0"/>
-        </a:xfrm>
-      </p:grpSpPr>
-      <p:sp>
-        <p:nvSpPr>
-          <p:cNvPr id="25" name="Rectangle 24">
-            <a:extLst>
-              <a:ext uri="{FF2B5EF4-FFF2-40B4-BE49-F238E27FC236}">
-                <a16:creationId xmlns:a16="http://schemas.microsoft.com/office/drawing/2014/main" id="{9844AD0E-E754-4310-8C91-FCB8F64D9E76}"/>
-              </a:ext>
-            </a:extLst>
-          </p:cNvPr>
-          <p:cNvSpPr/>
-          <p:nvPr/>
-        </p:nvSpPr>
-        <p:spPr>
-          <a:xfrm>
-            <a:off x="4203703" y="611916"/>
-            <a:ext cx="1650999" cy="1136067"/>
-          </a:xfrm>
-          <a:prstGeom prst="rect">
-            <a:avLst/>
-          </a:prstGeom>
-          <a:solidFill>
-            <a:schemeClr val="bg2">
-              <a:lumMod val="25000"/>
-              <a:alpha val="5000"/>
-            </a:schemeClr>
-          </a:solidFill>
-          <a:ln>
-            <a:solidFill>
-              <a:schemeClr val="bg2">
-                <a:lumMod val="25000"/>
-              </a:schemeClr>
-            </a:solidFill>
-          </a:ln>
-        </p:spPr>
-        <p:style>
-          <a:lnRef idx="2">
-            <a:schemeClr val="accent1">
-              <a:shade val="50000"/>
-            </a:schemeClr>
-          </a:lnRef>
-          <a:fillRef idx="1">
-            <a:schemeClr val="accent1"/>
-          </a:fillRef>
-          <a:effectRef idx="0">
-            <a:schemeClr val="accent1"/>
-          </a:effectRef>
-          <a:fontRef idx="minor">
-            <a:schemeClr val="lt1"/>
-          </a:fontRef>
-        </p:style>
-        <p:txBody>
-          <a:bodyPr rot="0" spcFirstLastPara="0" vertOverflow="overflow" horzOverflow="overflow" vert="horz" wrap="square" lIns="25400" tIns="12700" rIns="25400" bIns="12700" numCol="1" spcCol="0" rtlCol="0" fromWordArt="0" anchor="ctr" anchorCtr="0" forceAA="0" compatLnSpc="1">
-            <a:prstTxWarp prst="textNoShape">
-              <a:avLst/>
-            </a:prstTxWarp>
-            <a:noAutofit/>
-          </a:bodyPr>
-          <a:lstStyle/>
-          <a:p>
-            <a:pPr algn="ctr"/>
-            <a:endParaRPr lang="en-US" sz="500" dirty="0"/>
-          </a:p>
-        </p:txBody>
-      </p:sp>
-    </p:spTree>
-    <p:extLst>
-      <p:ext uri="{BB962C8B-B14F-4D97-AF65-F5344CB8AC3E}">
-        <p14:creationId xmlns:p14="http://schemas.microsoft.com/office/powerpoint/2010/main" val="3786142267"/>
       </p:ext>
     </p:extLst>
   </p:cSld>
